--- a/Main AICTE_IBM_BOB_Project_Submission_Template_for_EduentFoundation_.pptx
+++ b/Main AICTE_IBM_BOB_Project_Submission_Template_for_EduentFoundation_.pptx
@@ -16106,15 +16106,19 @@
           <a:p>
             <a:r>
               <a:rPr lang="en-US" sz="2400" b="1" dirty="0"/>
-              <a:t>Domain of  Project – </a:t>
-            </a:r>
-            <a:r>
-              <a:rPr lang="en-US" sz="2400" b="1" dirty="0">
+              <a:t>Domain of  Project </a:t>
+            </a:r>
+            <a:r>
+              <a:rPr lang="en-US" sz="2400" b="1"/>
+              <a:t>– </a:t>
+            </a:r>
+            <a:r>
+              <a:rPr lang="en-US" sz="2400" b="1">
                 <a:highlight>
                   <a:srgbClr val="FFFF00"/>
                 </a:highlight>
               </a:rPr>
-              <a:t>[ Education / Healthcare /  ]</a:t>
+              <a:t> Healthcare  </a:t>
             </a:r>
             <a:endParaRPr lang="en-IN" sz="2400" b="1" dirty="0">
               <a:highlight>

--- a/Main AICTE_IBM_BOB_Project_Submission_Template_for_EduentFoundation_.pptx
+++ b/Main AICTE_IBM_BOB_Project_Submission_Template_for_EduentFoundation_.pptx
@@ -14013,186 +14013,6 @@
           </a:bodyPr>
           <a:lstStyle/>
           <a:p>
-            <a:pPr marL="0" marR="0" lvl="0" indent="0" algn="l" rtl="0">
-              <a:lnSpc>
-                <a:spcPct val="162162"/>
-              </a:lnSpc>
-              <a:spcBef>
-                <a:spcPts val="0"/>
-              </a:spcBef>
-              <a:spcAft>
-                <a:spcPts val="0"/>
-              </a:spcAft>
-              <a:buClr>
-                <a:srgbClr val="2B3541"/>
-              </a:buClr>
-              <a:buSzPts val="1850"/>
-              <a:buFont typeface="Times New Roman"/>
-              <a:buNone/>
-            </a:pPr>
-            <a:r>
-              <a:rPr lang="en-US" sz="1850" b="0" i="0" u="none" strike="noStrike" cap="none" dirty="0">
-                <a:solidFill>
-                  <a:srgbClr val="2B3541"/>
-                </a:solidFill>
-                <a:latin typeface="Times New Roman"/>
-                <a:ea typeface="Times New Roman"/>
-                <a:cs typeface="Times New Roman"/>
-                <a:sym typeface="Times New Roman"/>
-              </a:rPr>
-              <a:t>· Please create public </a:t>
-            </a:r>
-            <a:r>
-              <a:rPr lang="en-US" sz="1850" b="0" i="0" u="none" strike="noStrike" cap="none" dirty="0" err="1">
-                <a:solidFill>
-                  <a:srgbClr val="2B3541"/>
-                </a:solidFill>
-                <a:latin typeface="Times New Roman"/>
-                <a:ea typeface="Times New Roman"/>
-                <a:cs typeface="Times New Roman"/>
-                <a:sym typeface="Times New Roman"/>
-              </a:rPr>
-              <a:t>github</a:t>
-            </a:r>
-            <a:r>
-              <a:rPr lang="en-US" sz="1850" b="0" i="0" u="none" strike="noStrike" cap="none" dirty="0">
-                <a:solidFill>
-                  <a:srgbClr val="2B3541"/>
-                </a:solidFill>
-                <a:latin typeface="Times New Roman"/>
-                <a:ea typeface="Times New Roman"/>
-                <a:cs typeface="Times New Roman"/>
-                <a:sym typeface="Times New Roman"/>
-              </a:rPr>
-              <a:t> repository (Enable Add README  button while creating repository) with format – </a:t>
-            </a:r>
-          </a:p>
-          <a:p>
-            <a:pPr marL="0" marR="0" lvl="0" indent="0" algn="l" rtl="0">
-              <a:lnSpc>
-                <a:spcPct val="162162"/>
-              </a:lnSpc>
-              <a:spcBef>
-                <a:spcPts val="0"/>
-              </a:spcBef>
-              <a:spcAft>
-                <a:spcPts val="0"/>
-              </a:spcAft>
-              <a:buClr>
-                <a:srgbClr val="2B3541"/>
-              </a:buClr>
-              <a:buSzPts val="1850"/>
-              <a:buFont typeface="Times New Roman"/>
-              <a:buNone/>
-            </a:pPr>
-            <a:r>
-              <a:rPr lang="en-US" sz="1850" dirty="0">
-                <a:solidFill>
-                  <a:srgbClr val="2B3541"/>
-                </a:solidFill>
-                <a:latin typeface="Times New Roman"/>
-                <a:ea typeface="Times New Roman"/>
-                <a:cs typeface="Times New Roman"/>
-                <a:sym typeface="Times New Roman"/>
-              </a:rPr>
-              <a:t>Please test and Paste the working  </a:t>
-            </a:r>
-            <a:r>
-              <a:rPr lang="en-US" sz="1850" dirty="0" err="1">
-                <a:solidFill>
-                  <a:srgbClr val="2B3541"/>
-                </a:solidFill>
-                <a:latin typeface="Times New Roman"/>
-                <a:ea typeface="Times New Roman"/>
-                <a:cs typeface="Times New Roman"/>
-                <a:sym typeface="Times New Roman"/>
-              </a:rPr>
-              <a:t>Github</a:t>
-            </a:r>
-            <a:r>
-              <a:rPr lang="en-US" sz="1850" dirty="0">
-                <a:solidFill>
-                  <a:srgbClr val="2B3541"/>
-                </a:solidFill>
-                <a:latin typeface="Times New Roman"/>
-                <a:ea typeface="Times New Roman"/>
-                <a:cs typeface="Times New Roman"/>
-                <a:sym typeface="Times New Roman"/>
-              </a:rPr>
-              <a:t> URL –</a:t>
-            </a:r>
-          </a:p>
-          <a:p>
-            <a:pPr lvl="0">
-              <a:lnSpc>
-                <a:spcPct val="162162"/>
-              </a:lnSpc>
-              <a:buClr>
-                <a:srgbClr val="2B3541"/>
-              </a:buClr>
-              <a:buSzPts val="1850"/>
-            </a:pPr>
-            <a:r>
-              <a:rPr lang="en-US" sz="1850" b="1" dirty="0">
-                <a:solidFill>
-                  <a:srgbClr val="2B3541"/>
-                </a:solidFill>
-                <a:latin typeface="Times New Roman"/>
-                <a:ea typeface="Times New Roman"/>
-                <a:cs typeface="Times New Roman"/>
-                <a:sym typeface="Times New Roman"/>
-              </a:rPr>
-              <a:t>Make sure you have Uploaded following three files into your </a:t>
-            </a:r>
-            <a:r>
-              <a:rPr lang="en-US" sz="1850" b="1" dirty="0" err="1">
-                <a:solidFill>
-                  <a:srgbClr val="2B3541"/>
-                </a:solidFill>
-                <a:latin typeface="Times New Roman"/>
-                <a:ea typeface="Times New Roman"/>
-                <a:cs typeface="Times New Roman"/>
-                <a:sym typeface="Times New Roman"/>
-              </a:rPr>
-              <a:t>github</a:t>
-            </a:r>
-            <a:r>
-              <a:rPr lang="en-US" sz="1850" b="1" dirty="0">
-                <a:solidFill>
-                  <a:srgbClr val="2B3541"/>
-                </a:solidFill>
-                <a:latin typeface="Times New Roman"/>
-                <a:ea typeface="Times New Roman"/>
-                <a:cs typeface="Times New Roman"/>
-                <a:sym typeface="Times New Roman"/>
-              </a:rPr>
-              <a:t> repository  </a:t>
-            </a:r>
-            <a:br>
-              <a:rPr lang="en-US" sz="1850" dirty="0">
-                <a:solidFill>
-                  <a:srgbClr val="2B3541"/>
-                </a:solidFill>
-                <a:latin typeface="Times New Roman"/>
-                <a:ea typeface="Times New Roman"/>
-                <a:cs typeface="Times New Roman"/>
-                <a:sym typeface="Times New Roman"/>
-              </a:rPr>
-            </a:br>
-            <a:r>
-              <a:rPr lang="en-US" sz="1850" dirty="0">
-                <a:solidFill>
-                  <a:srgbClr val="2B3541"/>
-                </a:solidFill>
-                <a:latin typeface="Times New Roman"/>
-                <a:ea typeface="Times New Roman"/>
-                <a:cs typeface="Times New Roman"/>
-                <a:sym typeface="Times New Roman"/>
-              </a:rPr>
-              <a:t>1) All Agent relevant files of IBM Cloud , 2) yourproblemstatement.pdf file  3) your projectpresntation.pptx file 4)any other files </a:t>
-            </a:r>
-          </a:p>
-          <a:p>
             <a:pPr lvl="0">
               <a:lnSpc>
                 <a:spcPct val="162162"/>
@@ -15082,15 +14902,7 @@
           <a:p>
             <a:r>
               <a:rPr lang="en-US" sz="2400" b="1" dirty="0"/>
-              <a:t>Please  add your </a:t>
-            </a:r>
-            <a:r>
-              <a:rPr lang="en-US" sz="2400" b="1" dirty="0" err="1"/>
-              <a:t>credly</a:t>
-            </a:r>
-            <a:r>
-              <a:rPr lang="en-US" sz="2400" b="1" dirty="0"/>
-              <a:t> certificate(Getting Started with Artificial Intelligence)  </a:t>
+              <a:t>  </a:t>
             </a:r>
           </a:p>
         </p:txBody>
@@ -15214,44 +15026,6 @@
           </a:p>
         </p:txBody>
       </p:sp>
-      <p:sp>
-        <p:nvSpPr>
-          <p:cNvPr id="6" name="TextBox 5">
-            <a:extLst>
-              <a:ext uri="{FF2B5EF4-FFF2-40B4-BE49-F238E27FC236}">
-                <a16:creationId xmlns:a16="http://schemas.microsoft.com/office/drawing/2014/main" id="{C0D36B1A-26C2-CD55-1032-4CB5E4EDF305}"/>
-              </a:ext>
-            </a:extLst>
-          </p:cNvPr>
-          <p:cNvSpPr txBox="1"/>
-          <p:nvPr/>
-        </p:nvSpPr>
-        <p:spPr>
-          <a:xfrm>
-            <a:off x="496843" y="800470"/>
-            <a:ext cx="5437681" cy="400110"/>
-          </a:xfrm>
-          <a:prstGeom prst="rect">
-            <a:avLst/>
-          </a:prstGeom>
-          <a:noFill/>
-        </p:spPr>
-        <p:txBody>
-          <a:bodyPr rot="0" spcFirstLastPara="0" vertOverflow="overflow" horzOverflow="overflow" vert="horz" wrap="square" lIns="91440" tIns="45720" rIns="91440" bIns="45720" numCol="1" spcCol="0" rtlCol="0" fromWordArt="0" anchor="t" anchorCtr="0" forceAA="0" compatLnSpc="1">
-            <a:prstTxWarp prst="textNoShape">
-              <a:avLst/>
-            </a:prstTxWarp>
-            <a:spAutoFit/>
-          </a:bodyPr>
-          <a:lstStyle/>
-          <a:p>
-            <a:r>
-              <a:rPr lang="en-US" sz="2000" b="1"/>
-              <a:t>Add your IBM BOB Certificate</a:t>
-            </a:r>
-          </a:p>
-        </p:txBody>
-      </p:sp>
       <p:pic>
         <p:nvPicPr>
           <p:cNvPr id="4" name="Picture 3">
@@ -15427,7 +15201,7 @@
           <p:nvPr>
             <p:extLst>
               <p:ext uri="{D42A27DB-BD31-4B8C-83A1-F6EECF244321}">
-                <p14:modId xmlns:p14="http://schemas.microsoft.com/office/powerpoint/2010/main" val="543267982"/>
+                <p14:modId xmlns:p14="http://schemas.microsoft.com/office/powerpoint/2010/main" val="3362080388"/>
               </p:ext>
             </p:extLst>
           </p:nvPr>
@@ -15956,7 +15730,7 @@
                       </a:pPr>
                       <a:r>
                         <a:rPr lang="en-IN" dirty="0"/>
-                        <a:t>ayushbangwal@2005@gmail.com</a:t>
+                        <a:t>ayushbangwal2005@gmail.com</a:t>
                       </a:r>
                       <a:endParaRPr dirty="0"/>
                     </a:p>
@@ -16106,14 +15880,10 @@
           <a:p>
             <a:r>
               <a:rPr lang="en-US" sz="2400" b="1" dirty="0"/>
-              <a:t>Domain of  Project </a:t>
-            </a:r>
-            <a:r>
-              <a:rPr lang="en-US" sz="2400" b="1"/>
-              <a:t>– </a:t>
-            </a:r>
-            <a:r>
-              <a:rPr lang="en-US" sz="2400" b="1">
+              <a:t>Domain of  Project – </a:t>
+            </a:r>
+            <a:r>
+              <a:rPr lang="en-US" sz="2400" b="1" dirty="0">
                 <a:highlight>
                   <a:srgbClr val="FFFF00"/>
                 </a:highlight>
@@ -17983,8 +17753,8 @@
         </p:blipFill>
         <p:spPr>
           <a:xfrm>
-            <a:off x="1276350" y="158868"/>
-            <a:ext cx="9873447" cy="6699131"/>
+            <a:off x="1861457" y="555864"/>
+            <a:ext cx="9288340" cy="6302136"/>
           </a:xfrm>
           <a:prstGeom prst="rect">
             <a:avLst/>
